--- a/assets/powerpoints/module-restaurant/A2-le-e-qui-tombe.pptx
+++ b/assets/powerpoints/module-restaurant/A2-le-e-qui-tombe.pptx
@@ -10709,7 +10709,25 @@
                 </a:solidFill>
                 <a:latin typeface="Verdana"/>
               </a:rPr>
-              <a:t>Un serveur préfère largement une phrase claire à une imitation approximative. Ce qu'il faut, c'est &lt;b&gt;reconnaître&lt;/b&gt; la forme resserrée — parce que c'est celle que vous entendrez.</a:t>
+              <a:t>Un serveur préfère largement une phrase claire à une imitation approximative. Ce qu'il faut, c'est </a:t>
+            </a:r>
+            <a:r>
+              <a:rPr sz="2000" b="1" i="0">
+                <a:solidFill>
+                  <a:srgbClr val="4B4F52"/>
+                </a:solidFill>
+                <a:latin typeface="Verdana"/>
+              </a:rPr>
+              <a:t>reconnaître</a:t>
+            </a:r>
+            <a:r>
+              <a:rPr sz="2000" b="0" i="0">
+                <a:solidFill>
+                  <a:srgbClr val="4B4F52"/>
+                </a:solidFill>
+                <a:latin typeface="Verdana"/>
+              </a:rPr>
+              <a:t> la forme resserrée — parce que c'est celle que vous entendrez.</a:t>
             </a:r>
           </a:p>
         </p:txBody>
